--- a/AI_for_Operations_Course/Slides/Class_01_AI_Powered_Operations_Landscape.pptx
+++ b/AI_for_Operations_Course/Slides/Class_01_AI_Powered_Operations_Landscape.pptx
@@ -1897,7 +1897,7 @@
                 <a:ea typeface="Calibri" pitchFamily="34" charset="-122"/>
                 <a:cs typeface="Calibri" pitchFamily="34" charset="-120"/>
               </a:rPr>
-              <a:t>Proxiant Academy — www.proxiant.com</a:t>
+              <a:t>Proxiant Academy | proxiant.ai</a:t>
             </a:r>
             <a:endParaRPr lang="en-US" sz="1600" dirty="0"/>
           </a:p>
@@ -1993,6 +1993,10 @@
           </a:solidFill>
           <a:ln/>
         </p:spPr>
+        <p:txBody>
+          <a:bodyPr/>
+          <a:p/>
+        </p:txBody>
       </p:sp>
       <p:sp>
         <p:nvSpPr>
@@ -2363,6 +2367,10 @@
           </a:solidFill>
           <a:ln/>
         </p:spPr>
+        <p:txBody>
+          <a:bodyPr/>
+          <a:p/>
+        </p:txBody>
       </p:sp>
       <p:sp>
         <p:nvSpPr>
@@ -2422,6 +2430,10 @@
           </a:solidFill>
           <a:ln/>
         </p:spPr>
+        <p:txBody>
+          <a:bodyPr/>
+          <a:p/>
+        </p:txBody>
       </p:sp>
       <p:sp>
         <p:nvSpPr>
@@ -2990,6 +3002,10 @@
           </a:solidFill>
           <a:ln/>
         </p:spPr>
+        <p:txBody>
+          <a:bodyPr/>
+          <a:p/>
+        </p:txBody>
       </p:sp>
       <p:sp>
         <p:nvSpPr>
@@ -3054,6 +3070,10 @@
             <a:prstDash val="solid"/>
           </a:ln>
         </p:spPr>
+        <p:txBody>
+          <a:bodyPr/>
+          <a:p/>
+        </p:txBody>
       </p:sp>
       <p:sp>
         <p:nvSpPr>
@@ -3238,6 +3258,10 @@
             <a:prstDash val="solid"/>
           </a:ln>
         </p:spPr>
+        <p:txBody>
+          <a:bodyPr/>
+          <a:p/>
+        </p:txBody>
       </p:sp>
       <p:sp>
         <p:nvSpPr>
@@ -3422,6 +3446,10 @@
             <a:prstDash val="solid"/>
           </a:ln>
         </p:spPr>
+        <p:txBody>
+          <a:bodyPr/>
+          <a:p/>
+        </p:txBody>
       </p:sp>
       <p:sp>
         <p:nvSpPr>
@@ -3606,6 +3634,10 @@
             <a:prstDash val="solid"/>
           </a:ln>
         </p:spPr>
+        <p:txBody>
+          <a:bodyPr/>
+          <a:p/>
+        </p:txBody>
       </p:sp>
       <p:sp>
         <p:nvSpPr>
@@ -3856,6 +3888,10 @@
           </a:solidFill>
           <a:ln/>
         </p:spPr>
+        <p:txBody>
+          <a:bodyPr/>
+          <a:p/>
+        </p:txBody>
       </p:sp>
       <p:sp>
         <p:nvSpPr>
@@ -3915,6 +3951,10 @@
           </a:solidFill>
           <a:ln/>
         </p:spPr>
+        <p:txBody>
+          <a:bodyPr/>
+          <a:p/>
+        </p:txBody>
       </p:sp>
       <p:sp>
         <p:nvSpPr>
@@ -4052,6 +4092,10 @@
           </a:solidFill>
           <a:ln/>
         </p:spPr>
+        <p:txBody>
+          <a:bodyPr/>
+          <a:p/>
+        </p:txBody>
       </p:sp>
       <p:sp>
         <p:nvSpPr>
@@ -4189,6 +4233,10 @@
           </a:solidFill>
           <a:ln/>
         </p:spPr>
+        <p:txBody>
+          <a:bodyPr/>
+          <a:p/>
+        </p:txBody>
       </p:sp>
       <p:sp>
         <p:nvSpPr>
@@ -4326,6 +4374,10 @@
           </a:solidFill>
           <a:ln/>
         </p:spPr>
+        <p:txBody>
+          <a:bodyPr/>
+          <a:p/>
+        </p:txBody>
       </p:sp>
       <p:sp>
         <p:nvSpPr>
@@ -4534,6 +4586,10 @@
           </a:solidFill>
           <a:ln/>
         </p:spPr>
+        <p:txBody>
+          <a:bodyPr/>
+          <a:p/>
+        </p:txBody>
       </p:sp>
       <p:sp>
         <p:nvSpPr>
@@ -4593,6 +4649,10 @@
           </a:solidFill>
           <a:ln/>
         </p:spPr>
+        <p:txBody>
+          <a:bodyPr/>
+          <a:p/>
+        </p:txBody>
       </p:sp>
       <p:sp>
         <p:nvSpPr>
@@ -4928,6 +4988,10 @@
           </a:solidFill>
           <a:ln/>
         </p:spPr>
+        <p:txBody>
+          <a:bodyPr/>
+          <a:p/>
+        </p:txBody>
       </p:sp>
       <p:sp>
         <p:nvSpPr>
@@ -5263,6 +5327,10 @@
           </a:solidFill>
           <a:ln/>
         </p:spPr>
+        <p:txBody>
+          <a:bodyPr/>
+          <a:p/>
+        </p:txBody>
       </p:sp>
       <p:sp>
         <p:nvSpPr>
@@ -5669,6 +5737,10 @@
           </a:solidFill>
           <a:ln/>
         </p:spPr>
+        <p:txBody>
+          <a:bodyPr/>
+          <a:p/>
+        </p:txBody>
       </p:sp>
       <p:sp>
         <p:nvSpPr>
@@ -6618,6 +6690,10 @@
           </a:solidFill>
           <a:ln/>
         </p:spPr>
+        <p:txBody>
+          <a:bodyPr/>
+          <a:p/>
+        </p:txBody>
       </p:sp>
       <p:sp>
         <p:nvSpPr>
@@ -6721,6 +6797,10 @@
             <a:prstDash val="solid"/>
           </a:ln>
         </p:spPr>
+        <p:txBody>
+          <a:bodyPr/>
+          <a:p/>
+        </p:txBody>
       </p:sp>
       <p:sp>
         <p:nvSpPr>
@@ -7358,6 +7438,10 @@
           </a:solidFill>
           <a:ln/>
         </p:spPr>
+        <p:txBody>
+          <a:bodyPr/>
+          <a:p/>
+        </p:txBody>
       </p:sp>
       <p:sp>
         <p:nvSpPr>
@@ -7417,6 +7501,10 @@
           </a:solidFill>
           <a:ln/>
         </p:spPr>
+        <p:txBody>
+          <a:bodyPr/>
+          <a:p/>
+        </p:txBody>
       </p:sp>
       <p:sp>
         <p:nvSpPr>
@@ -7476,6 +7564,10 @@
           </a:solidFill>
           <a:ln/>
         </p:spPr>
+        <p:txBody>
+          <a:bodyPr/>
+          <a:p/>
+        </p:txBody>
       </p:sp>
       <p:sp>
         <p:nvSpPr>
@@ -7535,6 +7627,10 @@
           </a:solidFill>
           <a:ln/>
         </p:spPr>
+        <p:txBody>
+          <a:bodyPr/>
+          <a:p/>
+        </p:txBody>
       </p:sp>
       <p:sp>
         <p:nvSpPr>
@@ -7594,6 +7690,10 @@
           </a:solidFill>
           <a:ln/>
         </p:spPr>
+        <p:txBody>
+          <a:bodyPr/>
+          <a:p/>
+        </p:txBody>
       </p:sp>
       <p:sp>
         <p:nvSpPr>
@@ -7653,6 +7753,10 @@
           </a:solidFill>
           <a:ln/>
         </p:spPr>
+        <p:txBody>
+          <a:bodyPr/>
+          <a:p/>
+        </p:txBody>
       </p:sp>
       <p:sp>
         <p:nvSpPr>
